--- a/slides/ch15-ai-agents-professional-communication.pptx
+++ b/slides/ch15-ai-agents-professional-communication.pptx
@@ -5955,7 +5955,7 @@
                 </a:solidFill>
                 <a:latin typeface="Calibri"/>
               </a:rPr>
-              <a:t>BADM 225 · Chapter 15</a:t>
+              <a:t>BADM 225 · Chapter 15  ·  © Derek D. Bussan</a:t>
             </a:r>
           </a:p>
         </p:txBody>
@@ -6242,7 +6242,7 @@
                 </a:solidFill>
                 <a:latin typeface="Calibri"/>
               </a:rPr>
-              <a:t>BADM 225 · Chapter 15</a:t>
+              <a:t>BADM 225 · Chapter 15  ·  © Derek D. Bussan</a:t>
             </a:r>
           </a:p>
         </p:txBody>
@@ -6529,7 +6529,7 @@
                 </a:solidFill>
                 <a:latin typeface="Calibri"/>
               </a:rPr>
-              <a:t>BADM 225 · Chapter 15</a:t>
+              <a:t>BADM 225 · Chapter 15  ·  © Derek D. Bussan</a:t>
             </a:r>
           </a:p>
         </p:txBody>
@@ -6894,7 +6894,7 @@
                 </a:solidFill>
                 <a:latin typeface="Calibri"/>
               </a:rPr>
-              <a:t>BADM 225 · Chapter 15</a:t>
+              <a:t>BADM 225 · Chapter 15  ·  © Derek D. Bussan</a:t>
             </a:r>
           </a:p>
         </p:txBody>
@@ -7022,7 +7022,7 @@
                 </a:solidFill>
                 <a:latin typeface="Calibri"/>
               </a:rPr>
-              <a:t>BADM 225 · Chapter 15</a:t>
+              <a:t>BADM 225 · Chapter 15  ·  © Derek D. Bussan</a:t>
             </a:r>
           </a:p>
         </p:txBody>
@@ -7584,7 +7584,7 @@
                 </a:solidFill>
                 <a:latin typeface="Calibri"/>
               </a:rPr>
-              <a:t>BADM 225 · Chapter 15</a:t>
+              <a:t>BADM 225 · Chapter 15  ·  © Derek D. Bussan</a:t>
             </a:r>
           </a:p>
         </p:txBody>
@@ -7871,7 +7871,7 @@
                 </a:solidFill>
                 <a:latin typeface="Calibri"/>
               </a:rPr>
-              <a:t>BADM 225 · Chapter 15</a:t>
+              <a:t>BADM 225 · Chapter 15  ·  © Derek D. Bussan</a:t>
             </a:r>
           </a:p>
         </p:txBody>
@@ -8236,7 +8236,7 @@
                 </a:solidFill>
                 <a:latin typeface="Calibri"/>
               </a:rPr>
-              <a:t>BADM 225 · Chapter 15</a:t>
+              <a:t>BADM 225 · Chapter 15  ·  © Derek D. Bussan</a:t>
             </a:r>
           </a:p>
         </p:txBody>
@@ -8364,7 +8364,7 @@
                 </a:solidFill>
                 <a:latin typeface="Calibri"/>
               </a:rPr>
-              <a:t>BADM 225 · Chapter 15</a:t>
+              <a:t>BADM 225 · Chapter 15  ·  © Derek D. Bussan</a:t>
             </a:r>
           </a:p>
         </p:txBody>
@@ -8651,7 +8651,7 @@
                 </a:solidFill>
                 <a:latin typeface="Calibri"/>
               </a:rPr>
-              <a:t>BADM 225 · Chapter 15</a:t>
+              <a:t>BADM 225 · Chapter 15  ·  © Derek D. Bussan</a:t>
             </a:r>
           </a:p>
         </p:txBody>
@@ -9093,7 +9093,7 @@
                 </a:solidFill>
                 <a:latin typeface="Calibri"/>
               </a:rPr>
-              <a:t>BADM 225 · Chapter 15</a:t>
+              <a:t>BADM 225 · Chapter 15  ·  © Derek D. Bussan</a:t>
             </a:r>
           </a:p>
         </p:txBody>
@@ -9492,7 +9492,7 @@
                 </a:solidFill>
                 <a:latin typeface="Calibri"/>
               </a:rPr>
-              <a:t>BADM 225 · Chapter 15</a:t>
+              <a:t>BADM 225 · Chapter 15  ·  © Derek D. Bussan</a:t>
             </a:r>
           </a:p>
         </p:txBody>
@@ -9620,7 +9620,7 @@
                 </a:solidFill>
                 <a:latin typeface="Calibri"/>
               </a:rPr>
-              <a:t>BADM 225 · Chapter 15</a:t>
+              <a:t>BADM 225 · Chapter 15  ·  © Derek D. Bussan</a:t>
             </a:r>
           </a:p>
         </p:txBody>
@@ -9907,7 +9907,7 @@
                 </a:solidFill>
                 <a:latin typeface="Calibri"/>
               </a:rPr>
-              <a:t>BADM 225 · Chapter 15</a:t>
+              <a:t>BADM 225 · Chapter 15  ·  © Derek D. Bussan</a:t>
             </a:r>
           </a:p>
         </p:txBody>
@@ -10194,7 +10194,7 @@
                 </a:solidFill>
                 <a:latin typeface="Calibri"/>
               </a:rPr>
-              <a:t>BADM 225 · Chapter 15</a:t>
+              <a:t>BADM 225 · Chapter 15  ·  © Derek D. Bussan</a:t>
             </a:r>
           </a:p>
         </p:txBody>
@@ -10481,7 +10481,7 @@
                 </a:solidFill>
                 <a:latin typeface="Calibri"/>
               </a:rPr>
-              <a:t>BADM 225 · Chapter 15</a:t>
+              <a:t>BADM 225 · Chapter 15  ·  © Derek D. Bussan</a:t>
             </a:r>
           </a:p>
         </p:txBody>
@@ -10846,7 +10846,7 @@
                 </a:solidFill>
                 <a:latin typeface="Calibri"/>
               </a:rPr>
-              <a:t>BADM 225 · Chapter 15</a:t>
+              <a:t>BADM 225 · Chapter 15  ·  © Derek D. Bussan</a:t>
             </a:r>
           </a:p>
         </p:txBody>
@@ -10974,7 +10974,7 @@
                 </a:solidFill>
                 <a:latin typeface="Calibri"/>
               </a:rPr>
-              <a:t>BADM 225 · Chapter 15</a:t>
+              <a:t>BADM 225 · Chapter 15  ·  © Derek D. Bussan</a:t>
             </a:r>
           </a:p>
         </p:txBody>
@@ -11295,7 +11295,7 @@
                 </a:solidFill>
                 <a:latin typeface="Calibri"/>
               </a:rPr>
-              <a:t>BADM 225 · Chapter 15</a:t>
+              <a:t>BADM 225 · Chapter 15  ·  © Derek D. Bussan</a:t>
             </a:r>
           </a:p>
         </p:txBody>
@@ -11582,7 +11582,7 @@
                 </a:solidFill>
                 <a:latin typeface="Calibri"/>
               </a:rPr>
-              <a:t>BADM 225 · Chapter 15</a:t>
+              <a:t>BADM 225 · Chapter 15  ·  © Derek D. Bussan</a:t>
             </a:r>
           </a:p>
         </p:txBody>
@@ -11869,7 +11869,7 @@
                 </a:solidFill>
                 <a:latin typeface="Calibri"/>
               </a:rPr>
-              <a:t>BADM 225 · Chapter 15</a:t>
+              <a:t>BADM 225 · Chapter 15  ·  © Derek D. Bussan</a:t>
             </a:r>
           </a:p>
         </p:txBody>
@@ -12606,7 +12606,7 @@
                 </a:solidFill>
                 <a:latin typeface="Calibri"/>
               </a:rPr>
-              <a:t>BADM 225 · Chapter 15</a:t>
+              <a:t>BADM 225 · Chapter 15  ·  © Derek D. Bussan</a:t>
             </a:r>
           </a:p>
         </p:txBody>
@@ -13010,7 +13010,7 @@
                 </a:solidFill>
                 <a:latin typeface="Calibri"/>
               </a:rPr>
-              <a:t>BADM 225 · Chapter 15</a:t>
+              <a:t>BADM 225 · Chapter 15  ·  © Derek D. Bussan</a:t>
             </a:r>
           </a:p>
         </p:txBody>
@@ -13286,7 +13286,7 @@
                 </a:solidFill>
                 <a:latin typeface="Calibri"/>
               </a:rPr>
-              <a:t>BADM 225 · Chapter 15</a:t>
+              <a:t>BADM 225 · Chapter 15  ·  © Derek D. Bussan</a:t>
             </a:r>
           </a:p>
         </p:txBody>
@@ -13379,7 +13379,7 @@
                 </a:solidFill>
                 <a:latin typeface="Calibri"/>
               </a:rPr>
-              <a:t>BADM 225 · Chapter 15</a:t>
+              <a:t>BADM 225 · Chapter 15  ·  © Derek D. Bussan</a:t>
             </a:r>
           </a:p>
         </p:txBody>
@@ -13778,7 +13778,7 @@
                 </a:solidFill>
                 <a:latin typeface="Calibri"/>
               </a:rPr>
-              <a:t>BADM 225 · Chapter 15</a:t>
+              <a:t>BADM 225 · Chapter 15  ·  © Derek D. Bussan</a:t>
             </a:r>
           </a:p>
         </p:txBody>
@@ -13906,7 +13906,7 @@
                 </a:solidFill>
                 <a:latin typeface="Calibri"/>
               </a:rPr>
-              <a:t>BADM 225 · Chapter 15</a:t>
+              <a:t>BADM 225 · Chapter 15  ·  © Derek D. Bussan</a:t>
             </a:r>
           </a:p>
         </p:txBody>
@@ -14193,7 +14193,7 @@
                 </a:solidFill>
                 <a:latin typeface="Calibri"/>
               </a:rPr>
-              <a:t>BADM 225 · Chapter 15</a:t>
+              <a:t>BADM 225 · Chapter 15  ·  © Derek D. Bussan</a:t>
             </a:r>
           </a:p>
         </p:txBody>
@@ -14685,7 +14685,7 @@
                 </a:solidFill>
                 <a:latin typeface="Calibri"/>
               </a:rPr>
-              <a:t>BADM 225 · Chapter 15</a:t>
+              <a:t>BADM 225 · Chapter 15  ·  © Derek D. Bussan</a:t>
             </a:r>
           </a:p>
         </p:txBody>
@@ -15050,7 +15050,7 @@
                 </a:solidFill>
                 <a:latin typeface="Calibri"/>
               </a:rPr>
-              <a:t>BADM 225 · Chapter 15</a:t>
+              <a:t>BADM 225 · Chapter 15  ·  © Derek D. Bussan</a:t>
             </a:r>
           </a:p>
         </p:txBody>
@@ -15178,7 +15178,7 @@
                 </a:solidFill>
                 <a:latin typeface="Calibri"/>
               </a:rPr>
-              <a:t>BADM 225 · Chapter 15</a:t>
+              <a:t>BADM 225 · Chapter 15  ·  © Derek D. Bussan</a:t>
             </a:r>
           </a:p>
         </p:txBody>

--- a/slides/ch15-ai-agents-professional-communication.pptx
+++ b/slides/ch15-ai-agents-professional-communication.pptx
@@ -5862,7 +5862,7 @@
                 </a:solidFill>
                 <a:latin typeface="Calibri"/>
               </a:rPr>
-              <a:t>BADM 225 · Chapter 15  ·  Original instructional material — no publisher content</a:t>
+              <a:t>BADM 225 · Chapter 15  ·  Original material © 2026 Derek D. Bussan, PhD, MBA  ·  No publisher content</a:t>
             </a:r>
           </a:p>
         </p:txBody>
